--- a/Panel_2_Presentation.pptx
+++ b/Panel_2_Presentation.pptx
@@ -5,7 +5,7 @@
     <p:sldMasterId id="2147483663" r:id="rId1"/>
   </p:sldMasterIdLst>
   <p:notesMasterIdLst>
-    <p:notesMasterId r:id="rId16"/>
+    <p:notesMasterId r:id="rId18"/>
   </p:notesMasterIdLst>
   <p:sldIdLst>
     <p:sldId id="270" r:id="rId2"/>
@@ -22,6 +22,8 @@
     <p:sldId id="281" r:id="rId13"/>
     <p:sldId id="282" r:id="rId14"/>
     <p:sldId id="283" r:id="rId15"/>
+    <p:sldId id="285" r:id="rId16"/>
+    <p:sldId id="284" r:id="rId17"/>
   </p:sldIdLst>
   <p:sldSz cx="12192000" cy="6858000"/>
   <p:notesSz cx="6858000" cy="12192000"/>
@@ -6708,6 +6710,7 @@
                         </a:defRPr>
                       </a:pPr>
                       <a:r>
+                        <a:rPr dirty="0"/>
                         <a:t>Heart Disease model training — Logistic Reg (92.25%)</a:t>
                       </a:r>
                     </a:p>
@@ -6811,6 +6814,7 @@
                         </a:defRPr>
                       </a:pPr>
                       <a:r>
+                        <a:rPr dirty="0"/>
                         <a:t>Parkinson's model training — Decision Tree (93.75%)</a:t>
                       </a:r>
                     </a:p>
@@ -7120,6 +7124,7 @@
                         </a:defRPr>
                       </a:pPr>
                       <a:r>
+                        <a:rPr dirty="0"/>
                         <a:t>System testing &amp; boundary validation</a:t>
                       </a:r>
                     </a:p>
@@ -7223,6 +7228,7 @@
                         </a:defRPr>
                       </a:pPr>
                       <a:r>
+                        <a:rPr dirty="0"/>
                         <a:t>Explainability (SHAP) &amp; documentation</a:t>
                       </a:r>
                     </a:p>
@@ -7326,6 +7332,7 @@
                         </a:defRPr>
                       </a:pPr>
                       <a:r>
+                        <a:rPr dirty="0"/>
                         <a:t>Final report &amp; viva preparation</a:t>
                       </a:r>
                     </a:p>
@@ -7350,6 +7357,7 @@
                         </a:defRPr>
                       </a:pPr>
                       <a:r>
+                        <a:rPr dirty="0"/>
                         <a:t>Pending</a:t>
                       </a:r>
                     </a:p>
@@ -8072,6 +8080,1040 @@
         </p:txBody>
       </p:sp>
     </p:spTree>
+  </p:cSld>
+  <p:clrMapOvr>
+    <a:masterClrMapping/>
+  </p:clrMapOvr>
+</p:sld>
+</file>
+
+<file path=ppt/slides/slide15.xml><?xml version="1.0" encoding="utf-8"?>
+<p:sld xmlns:a="http://schemas.openxmlformats.org/drawingml/2006/main" xmlns:r="http://schemas.openxmlformats.org/officeDocument/2006/relationships" xmlns:p="http://schemas.openxmlformats.org/presentationml/2006/main">
+  <p:cSld>
+    <p:spTree>
+      <p:nvGrpSpPr>
+        <p:cNvPr id="1" name=""/>
+        <p:cNvGrpSpPr/>
+        <p:nvPr/>
+      </p:nvGrpSpPr>
+      <p:grpSpPr>
+        <a:xfrm>
+          <a:off x="0" y="0"/>
+          <a:ext cx="0" cy="0"/>
+          <a:chOff x="0" y="0"/>
+          <a:chExt cx="0" cy="0"/>
+        </a:xfrm>
+      </p:grpSpPr>
+      <p:sp>
+        <p:nvSpPr>
+          <p:cNvPr id="3" name="Shape 0">
+            <a:extLst>
+              <a:ext uri="{FF2B5EF4-FFF2-40B4-BE49-F238E27FC236}">
+                <a16:creationId xmlns:a16="http://schemas.microsoft.com/office/drawing/2014/main" id="{20F82A1E-8FFE-E6BC-8F5A-D9328669FB04}"/>
+              </a:ext>
+            </a:extLst>
+          </p:cNvPr>
+          <p:cNvSpPr/>
+          <p:nvPr/>
+        </p:nvSpPr>
+        <p:spPr>
+          <a:xfrm>
+            <a:off x="868680" y="320040"/>
+            <a:ext cx="10424160" cy="658368"/>
+          </a:xfrm>
+          <a:prstGeom prst="rect">
+            <a:avLst/>
+          </a:prstGeom>
+          <a:solidFill>
+            <a:srgbClr val="94B6D2"/>
+          </a:solidFill>
+          <a:ln/>
+        </p:spPr>
+        <p:txBody>
+          <a:bodyPr/>
+          <a:lstStyle/>
+          <a:p>
+            <a:endParaRPr lang="en-IN"/>
+          </a:p>
+        </p:txBody>
+      </p:sp>
+      <p:sp>
+        <p:nvSpPr>
+          <p:cNvPr id="5" name="Shape 1">
+            <a:extLst>
+              <a:ext uri="{FF2B5EF4-FFF2-40B4-BE49-F238E27FC236}">
+                <a16:creationId xmlns:a16="http://schemas.microsoft.com/office/drawing/2014/main" id="{690FD20B-5125-FBD8-913B-502294C00E72}"/>
+              </a:ext>
+            </a:extLst>
+          </p:cNvPr>
+          <p:cNvSpPr/>
+          <p:nvPr/>
+        </p:nvSpPr>
+        <p:spPr>
+          <a:xfrm>
+            <a:off x="0" y="320040"/>
+            <a:ext cx="868680" cy="658368"/>
+          </a:xfrm>
+          <a:prstGeom prst="rect">
+            <a:avLst/>
+          </a:prstGeom>
+          <a:solidFill>
+            <a:srgbClr val="DD8047"/>
+          </a:solidFill>
+          <a:ln/>
+        </p:spPr>
+      </p:sp>
+      <p:sp>
+        <p:nvSpPr>
+          <p:cNvPr id="7" name="Text 2">
+            <a:extLst>
+              <a:ext uri="{FF2B5EF4-FFF2-40B4-BE49-F238E27FC236}">
+                <a16:creationId xmlns:a16="http://schemas.microsoft.com/office/drawing/2014/main" id="{7678672A-979F-57F4-0F85-F17B5DEA99E6}"/>
+              </a:ext>
+            </a:extLst>
+          </p:cNvPr>
+          <p:cNvSpPr txBox="1"/>
+          <p:nvPr/>
+        </p:nvSpPr>
+        <p:spPr>
+          <a:xfrm>
+            <a:off x="0" y="340614"/>
+            <a:ext cx="868680" cy="658368"/>
+          </a:xfrm>
+          <a:prstGeom prst="rect">
+            <a:avLst/>
+          </a:prstGeom>
+          <a:noFill/>
+          <a:ln/>
+        </p:spPr>
+        <p:txBody>
+          <a:bodyPr wrap="square" lIns="0" tIns="0" rIns="0" bIns="0" rtlCol="0" anchor="ctr"/>
+          <a:lstStyle/>
+          <a:p>
+            <a:pPr marL="0" indent="0" algn="ctr">
+              <a:buNone/>
+            </a:pPr>
+            <a:r>
+              <a:rPr lang="en-US" sz="2000" b="1" dirty="0">
+                <a:solidFill>
+                  <a:srgbClr val="FFFFFF"/>
+                </a:solidFill>
+                <a:latin typeface="Calibri" pitchFamily="34" charset="0"/>
+                <a:ea typeface="Calibri" pitchFamily="34" charset="-122"/>
+                <a:cs typeface="Calibri" pitchFamily="34" charset="-120"/>
+              </a:rPr>
+              <a:t>15</a:t>
+            </a:r>
+            <a:endParaRPr lang="en-US" sz="2000" dirty="0"/>
+          </a:p>
+        </p:txBody>
+      </p:sp>
+      <p:sp>
+        <p:nvSpPr>
+          <p:cNvPr id="9" name="Text 3">
+            <a:extLst>
+              <a:ext uri="{FF2B5EF4-FFF2-40B4-BE49-F238E27FC236}">
+                <a16:creationId xmlns:a16="http://schemas.microsoft.com/office/drawing/2014/main" id="{FAD52698-2DA6-1BD4-33C5-0A40C4762744}"/>
+              </a:ext>
+            </a:extLst>
+          </p:cNvPr>
+          <p:cNvSpPr txBox="1"/>
+          <p:nvPr/>
+        </p:nvSpPr>
+        <p:spPr>
+          <a:xfrm>
+            <a:off x="1051560" y="320040"/>
+            <a:ext cx="10241280" cy="658368"/>
+          </a:xfrm>
+          <a:prstGeom prst="rect">
+            <a:avLst/>
+          </a:prstGeom>
+          <a:noFill/>
+          <a:ln/>
+        </p:spPr>
+        <p:txBody>
+          <a:bodyPr wrap="square" lIns="0" tIns="0" rIns="0" bIns="0" rtlCol="0" anchor="ctr"/>
+          <a:lstStyle/>
+          <a:p>
+            <a:pPr marL="0" indent="0" algn="l">
+              <a:buNone/>
+            </a:pPr>
+            <a:r>
+              <a:rPr lang="en-US" sz="2200" b="1" dirty="0">
+                <a:solidFill>
+                  <a:srgbClr val="FFFFFF"/>
+                </a:solidFill>
+                <a:latin typeface="Cambria" pitchFamily="34" charset="0"/>
+                <a:ea typeface="Cambria" pitchFamily="34" charset="-122"/>
+                <a:cs typeface="Cambria" pitchFamily="34" charset="-120"/>
+              </a:rPr>
+              <a:t>References</a:t>
+            </a:r>
+            <a:endParaRPr lang="en-US" sz="2200" dirty="0"/>
+          </a:p>
+        </p:txBody>
+      </p:sp>
+      <p:pic>
+        <p:nvPicPr>
+          <p:cNvPr id="11" name="Image 0" descr="extracted/page0_img0.png">
+            <a:extLst>
+              <a:ext uri="{FF2B5EF4-FFF2-40B4-BE49-F238E27FC236}">
+                <a16:creationId xmlns:a16="http://schemas.microsoft.com/office/drawing/2014/main" id="{6B55706C-F9B4-8C45-B214-712723BF1517}"/>
+              </a:ext>
+            </a:extLst>
+          </p:cNvPr>
+          <p:cNvPicPr>
+            <a:picLocks noChangeAspect="1"/>
+          </p:cNvPicPr>
+          <p:nvPr/>
+        </p:nvPicPr>
+        <p:blipFill>
+          <a:blip r:embed="rId2"/>
+          <a:stretch>
+            <a:fillRect/>
+          </a:stretch>
+        </p:blipFill>
+        <p:spPr>
+          <a:xfrm>
+            <a:off x="11384280" y="137160"/>
+            <a:ext cx="640080" cy="758952"/>
+          </a:xfrm>
+          <a:prstGeom prst="rect">
+            <a:avLst/>
+          </a:prstGeom>
+        </p:spPr>
+      </p:pic>
+      <p:sp>
+        <p:nvSpPr>
+          <p:cNvPr id="13" name="Shape 4">
+            <a:extLst>
+              <a:ext uri="{FF2B5EF4-FFF2-40B4-BE49-F238E27FC236}">
+                <a16:creationId xmlns:a16="http://schemas.microsoft.com/office/drawing/2014/main" id="{2191610C-DFD0-C33A-327E-1067D761F3A0}"/>
+              </a:ext>
+            </a:extLst>
+          </p:cNvPr>
+          <p:cNvSpPr/>
+          <p:nvPr/>
+        </p:nvSpPr>
+        <p:spPr>
+          <a:xfrm>
+            <a:off x="0" y="6565392"/>
+            <a:ext cx="12191695" cy="292608"/>
+          </a:xfrm>
+          <a:prstGeom prst="rect">
+            <a:avLst/>
+          </a:prstGeom>
+          <a:solidFill>
+            <a:srgbClr val="17233B"/>
+          </a:solidFill>
+          <a:ln/>
+        </p:spPr>
+      </p:sp>
+      <p:sp>
+        <p:nvSpPr>
+          <p:cNvPr id="15" name="Text 5">
+            <a:extLst>
+              <a:ext uri="{FF2B5EF4-FFF2-40B4-BE49-F238E27FC236}">
+                <a16:creationId xmlns:a16="http://schemas.microsoft.com/office/drawing/2014/main" id="{92FCC03D-89E3-D181-3193-3F1D517F7695}"/>
+              </a:ext>
+            </a:extLst>
+          </p:cNvPr>
+          <p:cNvSpPr txBox="1"/>
+          <p:nvPr/>
+        </p:nvSpPr>
+        <p:spPr>
+          <a:xfrm>
+            <a:off x="274320" y="6565392"/>
+            <a:ext cx="11643055" cy="292608"/>
+          </a:xfrm>
+          <a:prstGeom prst="rect">
+            <a:avLst/>
+          </a:prstGeom>
+          <a:noFill/>
+          <a:ln/>
+        </p:spPr>
+        <p:txBody>
+          <a:bodyPr wrap="square" lIns="0" tIns="0" rIns="0" bIns="0" rtlCol="0" anchor="ctr"/>
+          <a:lstStyle/>
+          <a:p>
+            <a:pPr marL="0" indent="0" algn="l">
+              <a:buNone/>
+            </a:pPr>
+            <a:r>
+              <a:rPr lang="en-US" sz="900" dirty="0">
+                <a:solidFill>
+                  <a:srgbClr val="CBD5E1"/>
+                </a:solidFill>
+                <a:latin typeface="Calibri" pitchFamily="34" charset="0"/>
+                <a:ea typeface="Calibri" pitchFamily="34" charset="-122"/>
+                <a:cs typeface="Calibri" pitchFamily="34" charset="-120"/>
+              </a:rPr>
+              <a:t>Multi-Disease Prediction System using ML  |  Minor Project Part-I  |  RP-2</a:t>
+            </a:r>
+            <a:endParaRPr lang="en-US" sz="900" dirty="0"/>
+          </a:p>
+        </p:txBody>
+      </p:sp>
+      <p:sp>
+        <p:nvSpPr>
+          <p:cNvPr id="17" name="Text 6">
+            <a:extLst>
+              <a:ext uri="{FF2B5EF4-FFF2-40B4-BE49-F238E27FC236}">
+                <a16:creationId xmlns:a16="http://schemas.microsoft.com/office/drawing/2014/main" id="{B4424CFA-1414-E160-A9ED-4E09D357EEC5}"/>
+              </a:ext>
+            </a:extLst>
+          </p:cNvPr>
+          <p:cNvSpPr txBox="1"/>
+          <p:nvPr/>
+        </p:nvSpPr>
+        <p:spPr>
+          <a:xfrm>
+            <a:off x="502920" y="1284732"/>
+            <a:ext cx="502920" cy="685800"/>
+          </a:xfrm>
+          <a:prstGeom prst="rect">
+            <a:avLst/>
+          </a:prstGeom>
+          <a:noFill/>
+          <a:ln/>
+        </p:spPr>
+        <p:txBody>
+          <a:bodyPr wrap="square" lIns="25400" tIns="25400" rIns="25400" bIns="25400" rtlCol="0" anchor="ctr"/>
+          <a:lstStyle/>
+          <a:p>
+            <a:pPr marL="0" indent="0">
+              <a:buNone/>
+            </a:pPr>
+            <a:r>
+              <a:rPr lang="en-US" sz="1600" b="1" dirty="0">
+                <a:solidFill>
+                  <a:srgbClr val="DD8047"/>
+                </a:solidFill>
+                <a:latin typeface="Calibri" pitchFamily="34" charset="0"/>
+                <a:ea typeface="Calibri" pitchFamily="34" charset="-122"/>
+                <a:cs typeface="Calibri" pitchFamily="34" charset="-120"/>
+              </a:rPr>
+              <a:t>[1]</a:t>
+            </a:r>
+            <a:endParaRPr lang="en-US" sz="1600" dirty="0"/>
+          </a:p>
+        </p:txBody>
+      </p:sp>
+      <p:sp>
+        <p:nvSpPr>
+          <p:cNvPr id="19" name="Text 7">
+            <a:extLst>
+              <a:ext uri="{FF2B5EF4-FFF2-40B4-BE49-F238E27FC236}">
+                <a16:creationId xmlns:a16="http://schemas.microsoft.com/office/drawing/2014/main" id="{717F9B50-9FB7-18B3-5619-F2D3BB723064}"/>
+              </a:ext>
+            </a:extLst>
+          </p:cNvPr>
+          <p:cNvSpPr txBox="1"/>
+          <p:nvPr/>
+        </p:nvSpPr>
+        <p:spPr>
+          <a:xfrm>
+            <a:off x="1051560" y="1469898"/>
+            <a:ext cx="10515600" cy="685800"/>
+          </a:xfrm>
+          <a:prstGeom prst="rect">
+            <a:avLst/>
+          </a:prstGeom>
+          <a:noFill/>
+          <a:ln/>
+        </p:spPr>
+        <p:txBody>
+          <a:bodyPr wrap="square" lIns="25400" tIns="25400" rIns="25400" bIns="25400" rtlCol="0" anchor="t"/>
+          <a:lstStyle/>
+          <a:p>
+            <a:pPr marL="0" indent="0">
+              <a:lnSpc>
+                <a:spcPct val="115000"/>
+              </a:lnSpc>
+              <a:buNone/>
+            </a:pPr>
+            <a:r>
+              <a:rPr lang="en-US" sz="1600" dirty="0">
+                <a:solidFill>
+                  <a:srgbClr val="2B2B2B"/>
+                </a:solidFill>
+                <a:latin typeface="Calibri" pitchFamily="34" charset="0"/>
+                <a:ea typeface="Calibri" pitchFamily="34" charset="-122"/>
+                <a:cs typeface="Calibri" pitchFamily="34" charset="-120"/>
+              </a:rPr>
+              <a:t>C. Cortes and V. Vapnik, “Support-vector networks,” Machine Learning, vol. 20, no. 3, pp. 273–297, 1995. </a:t>
+            </a:r>
+            <a:r>
+              <a:rPr lang="en-US" sz="1600">
+                <a:solidFill>
+                  <a:srgbClr val="2B2B2B"/>
+                </a:solidFill>
+                <a:latin typeface="Calibri" pitchFamily="34" charset="0"/>
+                <a:ea typeface="Calibri" pitchFamily="34" charset="-122"/>
+                <a:cs typeface="Calibri" pitchFamily="34" charset="-120"/>
+                <a:hlinkClick r:id="rId3" action="ppaction://hlinkfile"/>
+              </a:rPr>
+              <a:t>Click Here</a:t>
+            </a:r>
+            <a:endParaRPr lang="en-US" sz="1600" dirty="0"/>
+          </a:p>
+        </p:txBody>
+      </p:sp>
+      <p:sp>
+        <p:nvSpPr>
+          <p:cNvPr id="21" name="Text 8">
+            <a:extLst>
+              <a:ext uri="{FF2B5EF4-FFF2-40B4-BE49-F238E27FC236}">
+                <a16:creationId xmlns:a16="http://schemas.microsoft.com/office/drawing/2014/main" id="{1688A0F0-F277-A4C0-68F5-2710945A15E3}"/>
+              </a:ext>
+            </a:extLst>
+          </p:cNvPr>
+          <p:cNvSpPr txBox="1"/>
+          <p:nvPr/>
+        </p:nvSpPr>
+        <p:spPr>
+          <a:xfrm>
+            <a:off x="502920" y="2034540"/>
+            <a:ext cx="502920" cy="685800"/>
+          </a:xfrm>
+          <a:prstGeom prst="rect">
+            <a:avLst/>
+          </a:prstGeom>
+          <a:noFill/>
+          <a:ln/>
+        </p:spPr>
+        <p:txBody>
+          <a:bodyPr wrap="square" lIns="25400" tIns="25400" rIns="25400" bIns="25400" rtlCol="0" anchor="ctr"/>
+          <a:lstStyle/>
+          <a:p>
+            <a:pPr marL="0" indent="0">
+              <a:buNone/>
+            </a:pPr>
+            <a:r>
+              <a:rPr lang="en-US" sz="1600" b="1" dirty="0">
+                <a:solidFill>
+                  <a:srgbClr val="DD8047"/>
+                </a:solidFill>
+                <a:latin typeface="Calibri" pitchFamily="34" charset="0"/>
+                <a:ea typeface="Calibri" pitchFamily="34" charset="-122"/>
+                <a:cs typeface="Calibri" pitchFamily="34" charset="-120"/>
+              </a:rPr>
+              <a:t>[2]</a:t>
+            </a:r>
+            <a:endParaRPr lang="en-US" sz="1600" dirty="0"/>
+          </a:p>
+        </p:txBody>
+      </p:sp>
+      <p:sp>
+        <p:nvSpPr>
+          <p:cNvPr id="23" name="Text 9">
+            <a:extLst>
+              <a:ext uri="{FF2B5EF4-FFF2-40B4-BE49-F238E27FC236}">
+                <a16:creationId xmlns:a16="http://schemas.microsoft.com/office/drawing/2014/main" id="{DA6C040D-43AE-82EA-B134-3223FA4CCAA9}"/>
+              </a:ext>
+            </a:extLst>
+          </p:cNvPr>
+          <p:cNvSpPr txBox="1"/>
+          <p:nvPr/>
+        </p:nvSpPr>
+        <p:spPr>
+          <a:xfrm>
+            <a:off x="1051560" y="2231136"/>
+            <a:ext cx="10515600" cy="685800"/>
+          </a:xfrm>
+          <a:prstGeom prst="rect">
+            <a:avLst/>
+          </a:prstGeom>
+          <a:noFill/>
+          <a:ln/>
+        </p:spPr>
+        <p:txBody>
+          <a:bodyPr wrap="square" lIns="25400" tIns="25400" rIns="25400" bIns="25400" rtlCol="0" anchor="t"/>
+          <a:lstStyle/>
+          <a:p>
+            <a:pPr marL="0" indent="0">
+              <a:lnSpc>
+                <a:spcPct val="115000"/>
+              </a:lnSpc>
+              <a:buNone/>
+            </a:pPr>
+            <a:r>
+              <a:rPr lang="en-US" sz="1600" dirty="0">
+                <a:solidFill>
+                  <a:srgbClr val="2B2B2B"/>
+                </a:solidFill>
+                <a:latin typeface="Calibri" pitchFamily="34" charset="0"/>
+                <a:ea typeface="Calibri" pitchFamily="34" charset="-122"/>
+                <a:cs typeface="Calibri" pitchFamily="34" charset="-120"/>
+              </a:rPr>
+              <a:t>Kaggle, “Pima Indians Diabetes Database,” [Online]. Available: </a:t>
+            </a:r>
+            <a:r>
+              <a:rPr lang="en-US" sz="1600" dirty="0">
+                <a:solidFill>
+                  <a:srgbClr val="2B2B2B"/>
+                </a:solidFill>
+                <a:latin typeface="Calibri" pitchFamily="34" charset="0"/>
+                <a:ea typeface="Calibri" pitchFamily="34" charset="-122"/>
+                <a:cs typeface="Calibri" pitchFamily="34" charset="-120"/>
+                <a:hlinkClick r:id="rId4"/>
+              </a:rPr>
+              <a:t>https://www.kaggle.com/datasets/uciml/pima-indians-diabetes-database</a:t>
+            </a:r>
+            <a:endParaRPr lang="en-US" sz="1600" dirty="0"/>
+          </a:p>
+        </p:txBody>
+      </p:sp>
+      <p:sp>
+        <p:nvSpPr>
+          <p:cNvPr id="25" name="Text 10">
+            <a:extLst>
+              <a:ext uri="{FF2B5EF4-FFF2-40B4-BE49-F238E27FC236}">
+                <a16:creationId xmlns:a16="http://schemas.microsoft.com/office/drawing/2014/main" id="{B5C72991-03A6-235A-EE7A-AE2F664876AC}"/>
+              </a:ext>
+            </a:extLst>
+          </p:cNvPr>
+          <p:cNvSpPr txBox="1"/>
+          <p:nvPr/>
+        </p:nvSpPr>
+        <p:spPr>
+          <a:xfrm>
+            <a:off x="502920" y="2784348"/>
+            <a:ext cx="502920" cy="685800"/>
+          </a:xfrm>
+          <a:prstGeom prst="rect">
+            <a:avLst/>
+          </a:prstGeom>
+          <a:noFill/>
+          <a:ln/>
+        </p:spPr>
+        <p:txBody>
+          <a:bodyPr wrap="square" lIns="25400" tIns="25400" rIns="25400" bIns="25400" rtlCol="0" anchor="ctr"/>
+          <a:lstStyle/>
+          <a:p>
+            <a:pPr marL="0" indent="0">
+              <a:buNone/>
+            </a:pPr>
+            <a:r>
+              <a:rPr lang="en-US" sz="1600" b="1" dirty="0">
+                <a:solidFill>
+                  <a:srgbClr val="DD8047"/>
+                </a:solidFill>
+                <a:latin typeface="Calibri" pitchFamily="34" charset="0"/>
+                <a:ea typeface="Calibri" pitchFamily="34" charset="-122"/>
+                <a:cs typeface="Calibri" pitchFamily="34" charset="-120"/>
+              </a:rPr>
+              <a:t>[3]</a:t>
+            </a:r>
+            <a:endParaRPr lang="en-US" sz="1600" dirty="0"/>
+          </a:p>
+        </p:txBody>
+      </p:sp>
+      <p:sp>
+        <p:nvSpPr>
+          <p:cNvPr id="27" name="Text 11">
+            <a:extLst>
+              <a:ext uri="{FF2B5EF4-FFF2-40B4-BE49-F238E27FC236}">
+                <a16:creationId xmlns:a16="http://schemas.microsoft.com/office/drawing/2014/main" id="{DCA38DC3-33C1-DBCD-A472-B8F545AFA35A}"/>
+              </a:ext>
+            </a:extLst>
+          </p:cNvPr>
+          <p:cNvSpPr txBox="1"/>
+          <p:nvPr/>
+        </p:nvSpPr>
+        <p:spPr>
+          <a:xfrm>
+            <a:off x="1051560" y="2916936"/>
+            <a:ext cx="10515600" cy="685800"/>
+          </a:xfrm>
+          <a:prstGeom prst="rect">
+            <a:avLst/>
+          </a:prstGeom>
+          <a:noFill/>
+          <a:ln/>
+        </p:spPr>
+        <p:txBody>
+          <a:bodyPr wrap="square" lIns="25400" tIns="25400" rIns="25400" bIns="25400" rtlCol="0" anchor="t"/>
+          <a:lstStyle/>
+          <a:p>
+            <a:pPr>
+              <a:lnSpc>
+                <a:spcPct val="115000"/>
+              </a:lnSpc>
+            </a:pPr>
+            <a:r>
+              <a:rPr lang="en-US" sz="1600" dirty="0">
+                <a:solidFill>
+                  <a:srgbClr val="2B2B2B"/>
+                </a:solidFill>
+                <a:latin typeface="Calibri" pitchFamily="34" charset="0"/>
+                <a:ea typeface="Calibri" pitchFamily="34" charset="-122"/>
+                <a:cs typeface="Calibri" pitchFamily="34" charset="-120"/>
+              </a:rPr>
+              <a:t>Janosi, W. Steinbrunn, M. Pfisterer, and R. Detrano, “Heart Disease,” UCI Machine Learning Repository, 1989. [Online]. Available: </a:t>
+            </a:r>
+            <a:r>
+              <a:rPr lang="en-US" sz="1600" dirty="0">
+                <a:hlinkClick r:id="rId5"/>
+              </a:rPr>
+              <a:t>https://archive.ics.uci.edu/dataset/45/heart+disease</a:t>
+            </a:r>
+            <a:endParaRPr lang="en-US" sz="1600" dirty="0"/>
+          </a:p>
+        </p:txBody>
+      </p:sp>
+      <p:sp>
+        <p:nvSpPr>
+          <p:cNvPr id="29" name="Text 12">
+            <a:extLst>
+              <a:ext uri="{FF2B5EF4-FFF2-40B4-BE49-F238E27FC236}">
+                <a16:creationId xmlns:a16="http://schemas.microsoft.com/office/drawing/2014/main" id="{67C074A8-329A-8E74-4EFF-A48145629F8F}"/>
+              </a:ext>
+            </a:extLst>
+          </p:cNvPr>
+          <p:cNvSpPr txBox="1"/>
+          <p:nvPr/>
+        </p:nvSpPr>
+        <p:spPr>
+          <a:xfrm>
+            <a:off x="502920" y="3534156"/>
+            <a:ext cx="502920" cy="685800"/>
+          </a:xfrm>
+          <a:prstGeom prst="rect">
+            <a:avLst/>
+          </a:prstGeom>
+          <a:noFill/>
+          <a:ln/>
+        </p:spPr>
+        <p:txBody>
+          <a:bodyPr wrap="square" lIns="25400" tIns="25400" rIns="25400" bIns="25400" rtlCol="0" anchor="ctr"/>
+          <a:lstStyle/>
+          <a:p>
+            <a:pPr marL="0" indent="0">
+              <a:buNone/>
+            </a:pPr>
+            <a:r>
+              <a:rPr lang="en-US" sz="1600" b="1" dirty="0">
+                <a:solidFill>
+                  <a:srgbClr val="DD8047"/>
+                </a:solidFill>
+                <a:latin typeface="Calibri" pitchFamily="34" charset="0"/>
+                <a:ea typeface="Calibri" pitchFamily="34" charset="-122"/>
+                <a:cs typeface="Calibri" pitchFamily="34" charset="-120"/>
+              </a:rPr>
+              <a:t>[4]</a:t>
+            </a:r>
+            <a:endParaRPr lang="en-US" sz="1600" dirty="0"/>
+          </a:p>
+        </p:txBody>
+      </p:sp>
+      <p:sp>
+        <p:nvSpPr>
+          <p:cNvPr id="31" name="Text 13">
+            <a:extLst>
+              <a:ext uri="{FF2B5EF4-FFF2-40B4-BE49-F238E27FC236}">
+                <a16:creationId xmlns:a16="http://schemas.microsoft.com/office/drawing/2014/main" id="{50048CF7-2198-C9B4-79A8-D1AD4CECE198}"/>
+              </a:ext>
+            </a:extLst>
+          </p:cNvPr>
+          <p:cNvSpPr txBox="1"/>
+          <p:nvPr/>
+        </p:nvSpPr>
+        <p:spPr>
+          <a:xfrm>
+            <a:off x="1082040" y="3717036"/>
+            <a:ext cx="10515600" cy="685800"/>
+          </a:xfrm>
+          <a:prstGeom prst="rect">
+            <a:avLst/>
+          </a:prstGeom>
+          <a:noFill/>
+          <a:ln/>
+        </p:spPr>
+        <p:txBody>
+          <a:bodyPr wrap="square" lIns="25400" tIns="25400" rIns="25400" bIns="25400" rtlCol="0" anchor="t"/>
+          <a:lstStyle/>
+          <a:p>
+            <a:pPr marL="0" indent="0">
+              <a:lnSpc>
+                <a:spcPct val="115000"/>
+              </a:lnSpc>
+              <a:buNone/>
+            </a:pPr>
+            <a:r>
+              <a:rPr lang="en-US" sz="1600" dirty="0">
+                <a:solidFill>
+                  <a:srgbClr val="2B2B2B"/>
+                </a:solidFill>
+                <a:latin typeface="Calibri" pitchFamily="34" charset="0"/>
+                <a:ea typeface="Calibri" pitchFamily="34" charset="-122"/>
+                <a:cs typeface="Calibri" pitchFamily="34" charset="-120"/>
+              </a:rPr>
+              <a:t>M. Little, “Parkinsons,” UCI Machine Learning Repository, 2007. [Online]. Available: </a:t>
+            </a:r>
+            <a:r>
+              <a:rPr lang="en-US" sz="1600" dirty="0">
+                <a:solidFill>
+                  <a:srgbClr val="2B2B2B"/>
+                </a:solidFill>
+                <a:latin typeface="Calibri" pitchFamily="34" charset="0"/>
+                <a:ea typeface="Calibri" pitchFamily="34" charset="-122"/>
+                <a:cs typeface="Calibri" pitchFamily="34" charset="-120"/>
+                <a:hlinkClick r:id="rId6"/>
+              </a:rPr>
+              <a:t>https://archive.ics.uci.edu/dataset/174/parkinsons</a:t>
+            </a:r>
+            <a:endParaRPr lang="en-US" sz="1600" dirty="0"/>
+          </a:p>
+        </p:txBody>
+      </p:sp>
+      <p:sp>
+        <p:nvSpPr>
+          <p:cNvPr id="33" name="Text 14">
+            <a:extLst>
+              <a:ext uri="{FF2B5EF4-FFF2-40B4-BE49-F238E27FC236}">
+                <a16:creationId xmlns:a16="http://schemas.microsoft.com/office/drawing/2014/main" id="{011B8CB8-5BFA-178E-C2A4-0D65FAF01EDC}"/>
+              </a:ext>
+            </a:extLst>
+          </p:cNvPr>
+          <p:cNvSpPr txBox="1"/>
+          <p:nvPr/>
+        </p:nvSpPr>
+        <p:spPr>
+          <a:xfrm>
+            <a:off x="502920" y="4283964"/>
+            <a:ext cx="502920" cy="685800"/>
+          </a:xfrm>
+          <a:prstGeom prst="rect">
+            <a:avLst/>
+          </a:prstGeom>
+          <a:noFill/>
+          <a:ln/>
+        </p:spPr>
+        <p:txBody>
+          <a:bodyPr wrap="square" lIns="25400" tIns="25400" rIns="25400" bIns="25400" rtlCol="0" anchor="ctr"/>
+          <a:lstStyle/>
+          <a:p>
+            <a:pPr marL="0" indent="0">
+              <a:buNone/>
+            </a:pPr>
+            <a:r>
+              <a:rPr lang="en-US" sz="1600" b="1" dirty="0">
+                <a:solidFill>
+                  <a:srgbClr val="DD8047"/>
+                </a:solidFill>
+                <a:latin typeface="Calibri" pitchFamily="34" charset="0"/>
+                <a:ea typeface="Calibri" pitchFamily="34" charset="-122"/>
+                <a:cs typeface="Calibri" pitchFamily="34" charset="-120"/>
+              </a:rPr>
+              <a:t>[5]</a:t>
+            </a:r>
+            <a:endParaRPr lang="en-US" sz="1600" dirty="0"/>
+          </a:p>
+        </p:txBody>
+      </p:sp>
+      <p:sp>
+        <p:nvSpPr>
+          <p:cNvPr id="35" name="Text 15">
+            <a:extLst>
+              <a:ext uri="{FF2B5EF4-FFF2-40B4-BE49-F238E27FC236}">
+                <a16:creationId xmlns:a16="http://schemas.microsoft.com/office/drawing/2014/main" id="{86B8FD73-2BE6-8E1D-A8E5-08F7C4227E9D}"/>
+              </a:ext>
+            </a:extLst>
+          </p:cNvPr>
+          <p:cNvSpPr txBox="1"/>
+          <p:nvPr/>
+        </p:nvSpPr>
+        <p:spPr>
+          <a:xfrm>
+            <a:off x="1051560" y="4466844"/>
+            <a:ext cx="10515600" cy="685800"/>
+          </a:xfrm>
+          <a:prstGeom prst="rect">
+            <a:avLst/>
+          </a:prstGeom>
+          <a:noFill/>
+          <a:ln/>
+        </p:spPr>
+        <p:txBody>
+          <a:bodyPr wrap="square" lIns="25400" tIns="25400" rIns="25400" bIns="25400" rtlCol="0" anchor="t"/>
+          <a:lstStyle/>
+          <a:p>
+            <a:pPr marL="0" indent="0">
+              <a:lnSpc>
+                <a:spcPct val="115000"/>
+              </a:lnSpc>
+              <a:buNone/>
+            </a:pPr>
+            <a:r>
+              <a:rPr lang="en-US" sz="1600" dirty="0">
+                <a:solidFill>
+                  <a:srgbClr val="2B2B2B"/>
+                </a:solidFill>
+                <a:latin typeface="Calibri" pitchFamily="34" charset="0"/>
+                <a:ea typeface="Calibri" pitchFamily="34" charset="-122"/>
+                <a:cs typeface="Calibri" pitchFamily="34" charset="-120"/>
+              </a:rPr>
+              <a:t>School of Computer Science &amp; Engineering, California State University, “A Comparative Study of Diabetes Prediction Based on Lifestyle Factors” </a:t>
+            </a:r>
+            <a:r>
+              <a:rPr lang="en-US" sz="1600" dirty="0">
+                <a:solidFill>
+                  <a:srgbClr val="2B2B2B"/>
+                </a:solidFill>
+                <a:latin typeface="Calibri" pitchFamily="34" charset="0"/>
+                <a:ea typeface="Calibri" pitchFamily="34" charset="-122"/>
+                <a:cs typeface="Calibri" pitchFamily="34" charset="-120"/>
+                <a:hlinkClick r:id="rId7" action="ppaction://hlinkfile"/>
+              </a:rPr>
+              <a:t>Click Here</a:t>
+            </a:r>
+            <a:endParaRPr lang="en-US" sz="1600" dirty="0"/>
+          </a:p>
+        </p:txBody>
+      </p:sp>
+      <p:sp>
+        <p:nvSpPr>
+          <p:cNvPr id="37" name="Text 16">
+            <a:extLst>
+              <a:ext uri="{FF2B5EF4-FFF2-40B4-BE49-F238E27FC236}">
+                <a16:creationId xmlns:a16="http://schemas.microsoft.com/office/drawing/2014/main" id="{9EFA8688-1EB8-DAE9-0F73-97D99B7EDAA7}"/>
+              </a:ext>
+            </a:extLst>
+          </p:cNvPr>
+          <p:cNvSpPr txBox="1"/>
+          <p:nvPr/>
+        </p:nvSpPr>
+        <p:spPr>
+          <a:xfrm>
+            <a:off x="502920" y="5033772"/>
+            <a:ext cx="502920" cy="685800"/>
+          </a:xfrm>
+          <a:prstGeom prst="rect">
+            <a:avLst/>
+          </a:prstGeom>
+          <a:noFill/>
+          <a:ln/>
+        </p:spPr>
+        <p:txBody>
+          <a:bodyPr wrap="square" lIns="25400" tIns="25400" rIns="25400" bIns="25400" rtlCol="0" anchor="ctr"/>
+          <a:lstStyle/>
+          <a:p>
+            <a:pPr marL="0" indent="0">
+              <a:buNone/>
+            </a:pPr>
+            <a:r>
+              <a:rPr lang="en-US" sz="1600" b="1" dirty="0">
+                <a:solidFill>
+                  <a:srgbClr val="DD8047"/>
+                </a:solidFill>
+                <a:latin typeface="Calibri" pitchFamily="34" charset="0"/>
+                <a:ea typeface="Calibri" pitchFamily="34" charset="-122"/>
+                <a:cs typeface="Calibri" pitchFamily="34" charset="-120"/>
+              </a:rPr>
+              <a:t>[6]</a:t>
+            </a:r>
+            <a:endParaRPr lang="en-US" sz="1600" dirty="0"/>
+          </a:p>
+        </p:txBody>
+      </p:sp>
+      <p:sp>
+        <p:nvSpPr>
+          <p:cNvPr id="39" name="Text 17">
+            <a:extLst>
+              <a:ext uri="{FF2B5EF4-FFF2-40B4-BE49-F238E27FC236}">
+                <a16:creationId xmlns:a16="http://schemas.microsoft.com/office/drawing/2014/main" id="{AEB50856-C790-2D39-52C2-465AFE0A6852}"/>
+              </a:ext>
+            </a:extLst>
+          </p:cNvPr>
+          <p:cNvSpPr txBox="1"/>
+          <p:nvPr/>
+        </p:nvSpPr>
+        <p:spPr>
+          <a:xfrm>
+            <a:off x="1051560" y="5202936"/>
+            <a:ext cx="10515600" cy="685800"/>
+          </a:xfrm>
+          <a:prstGeom prst="rect">
+            <a:avLst/>
+          </a:prstGeom>
+          <a:noFill/>
+          <a:ln/>
+        </p:spPr>
+        <p:txBody>
+          <a:bodyPr wrap="square" lIns="25400" tIns="25400" rIns="25400" bIns="25400" rtlCol="0" anchor="t"/>
+          <a:lstStyle/>
+          <a:p>
+            <a:pPr marL="0" indent="0">
+              <a:lnSpc>
+                <a:spcPct val="115000"/>
+              </a:lnSpc>
+              <a:buNone/>
+            </a:pPr>
+            <a:r>
+              <a:rPr lang="en-US" sz="1600" dirty="0">
+                <a:solidFill>
+                  <a:srgbClr val="2B2B2B"/>
+                </a:solidFill>
+                <a:latin typeface="Calibri" pitchFamily="34" charset="0"/>
+                <a:ea typeface="Calibri" pitchFamily="34" charset="-122"/>
+                <a:cs typeface="Calibri" pitchFamily="34" charset="-120"/>
+              </a:rPr>
+              <a:t>D. Dua and C. Graff, “UCI Machine Learning Repository,” University of California, Irvine, School of Information and Computer Sciences, 2019. [Online]. Available: </a:t>
+            </a:r>
+            <a:r>
+              <a:rPr lang="en-US" sz="1600" dirty="0">
+                <a:solidFill>
+                  <a:srgbClr val="2B2B2B"/>
+                </a:solidFill>
+                <a:latin typeface="Calibri" pitchFamily="34" charset="0"/>
+                <a:ea typeface="Calibri" pitchFamily="34" charset="-122"/>
+                <a:cs typeface="Calibri" pitchFamily="34" charset="-120"/>
+                <a:hlinkClick r:id="rId8"/>
+              </a:rPr>
+              <a:t>http://archive.ics.uci.edu/ml</a:t>
+            </a:r>
+            <a:endParaRPr lang="en-US" sz="1600" dirty="0"/>
+          </a:p>
+        </p:txBody>
+      </p:sp>
+    </p:spTree>
+    <p:extLst>
+      <p:ext uri="{BB962C8B-B14F-4D97-AF65-F5344CB8AC3E}">
+        <p14:creationId xmlns:p14="http://schemas.microsoft.com/office/powerpoint/2010/main" val="1960601407"/>
+      </p:ext>
+    </p:extLst>
+  </p:cSld>
+  <p:clrMapOvr>
+    <a:masterClrMapping/>
+  </p:clrMapOvr>
+</p:sld>
+</file>
+
+<file path=ppt/slides/slide16.xml><?xml version="1.0" encoding="utf-8"?>
+<p:sld xmlns:a="http://schemas.openxmlformats.org/drawingml/2006/main" xmlns:r="http://schemas.openxmlformats.org/officeDocument/2006/relationships" xmlns:p="http://schemas.openxmlformats.org/presentationml/2006/main">
+  <p:cSld>
+    <p:spTree>
+      <p:nvGrpSpPr>
+        <p:cNvPr id="1" name=""/>
+        <p:cNvGrpSpPr/>
+        <p:nvPr/>
+      </p:nvGrpSpPr>
+      <p:grpSpPr>
+        <a:xfrm>
+          <a:off x="0" y="0"/>
+          <a:ext cx="0" cy="0"/>
+          <a:chOff x="0" y="0"/>
+          <a:chExt cx="0" cy="0"/>
+        </a:xfrm>
+      </p:grpSpPr>
+      <p:pic>
+        <p:nvPicPr>
+          <p:cNvPr id="3" name="Picture 2">
+            <a:extLst>
+              <a:ext uri="{FF2B5EF4-FFF2-40B4-BE49-F238E27FC236}">
+                <a16:creationId xmlns:a16="http://schemas.microsoft.com/office/drawing/2014/main" id="{6816115D-224F-60CA-879B-8E33D8C3F504}"/>
+              </a:ext>
+            </a:extLst>
+          </p:cNvPr>
+          <p:cNvPicPr>
+            <a:picLocks noChangeAspect="1"/>
+          </p:cNvPicPr>
+          <p:nvPr/>
+        </p:nvPicPr>
+        <p:blipFill>
+          <a:blip r:embed="rId2"/>
+          <a:stretch>
+            <a:fillRect/>
+          </a:stretch>
+        </p:blipFill>
+        <p:spPr>
+          <a:xfrm>
+            <a:off x="0" y="93306"/>
+            <a:ext cx="12192000" cy="6858000"/>
+          </a:xfrm>
+          <a:prstGeom prst="rect">
+            <a:avLst/>
+          </a:prstGeom>
+        </p:spPr>
+      </p:pic>
+      <p:sp>
+        <p:nvSpPr>
+          <p:cNvPr id="5" name="Text 2">
+            <a:extLst>
+              <a:ext uri="{FF2B5EF4-FFF2-40B4-BE49-F238E27FC236}">
+                <a16:creationId xmlns:a16="http://schemas.microsoft.com/office/drawing/2014/main" id="{B431200C-E0C0-8441-52B0-9C4EA37B20BC}"/>
+              </a:ext>
+            </a:extLst>
+          </p:cNvPr>
+          <p:cNvSpPr txBox="1"/>
+          <p:nvPr/>
+        </p:nvSpPr>
+        <p:spPr>
+          <a:xfrm>
+            <a:off x="-79776" y="1848674"/>
+            <a:ext cx="868680" cy="658368"/>
+          </a:xfrm>
+          <a:prstGeom prst="rect">
+            <a:avLst/>
+          </a:prstGeom>
+          <a:noFill/>
+          <a:ln/>
+        </p:spPr>
+        <p:txBody>
+          <a:bodyPr wrap="square" lIns="0" tIns="0" rIns="0" bIns="0" rtlCol="0" anchor="ctr"/>
+          <a:lstStyle/>
+          <a:p>
+            <a:pPr marL="0" indent="0" algn="ctr">
+              <a:buNone/>
+            </a:pPr>
+            <a:r>
+              <a:rPr lang="en-US" sz="2000" b="1">
+                <a:solidFill>
+                  <a:srgbClr val="FFFFFF"/>
+                </a:solidFill>
+                <a:latin typeface="Calibri" pitchFamily="34" charset="0"/>
+                <a:ea typeface="Calibri" pitchFamily="34" charset="-122"/>
+                <a:cs typeface="Calibri" pitchFamily="34" charset="-120"/>
+              </a:rPr>
+              <a:t>16</a:t>
+            </a:r>
+            <a:endParaRPr lang="en-US" sz="2000" dirty="0"/>
+          </a:p>
+        </p:txBody>
+      </p:sp>
+      <p:sp>
+        <p:nvSpPr>
+          <p:cNvPr id="7" name="Shape 1">
+            <a:extLst>
+              <a:ext uri="{FF2B5EF4-FFF2-40B4-BE49-F238E27FC236}">
+                <a16:creationId xmlns:a16="http://schemas.microsoft.com/office/drawing/2014/main" id="{90D1ED0B-0769-E048-316A-B0D7F3522D3F}"/>
+              </a:ext>
+            </a:extLst>
+          </p:cNvPr>
+          <p:cNvSpPr/>
+          <p:nvPr/>
+        </p:nvSpPr>
+        <p:spPr>
+          <a:xfrm>
+            <a:off x="709127" y="1745431"/>
+            <a:ext cx="868680" cy="658368"/>
+          </a:xfrm>
+          <a:prstGeom prst="rect">
+            <a:avLst/>
+          </a:prstGeom>
+          <a:solidFill>
+            <a:srgbClr val="DD8047"/>
+          </a:solidFill>
+          <a:ln/>
+        </p:spPr>
+      </p:sp>
+    </p:spTree>
+    <p:extLst>
+      <p:ext uri="{BB962C8B-B14F-4D97-AF65-F5344CB8AC3E}">
+        <p14:creationId xmlns:p14="http://schemas.microsoft.com/office/powerpoint/2010/main" val="3078403673"/>
+      </p:ext>
+    </p:extLst>
   </p:cSld>
   <p:clrMapOvr>
     <a:masterClrMapping/>
